--- a/基本材料/保研自我介绍.pptx
+++ b/基本材料/保研自我介绍.pptx
@@ -5112,31 +5112,8 @@
                 </a:solidFill>
                 <a:latin typeface="+mj-ea"/>
                 <a:ea typeface="+mj-ea"/>
-                <a:sym typeface="+mn-ea"/>
               </a:rPr>
-              <a:t>合肥工业大学</a:t>
-            </a:r>
-            <a:r>
-              <a:rPr lang="en-US" altLang="zh-CN" sz="2000" b="1" dirty="0">
-                <a:solidFill>
-                  <a:schemeClr val="bg1"/>
-                </a:solidFill>
-                <a:latin typeface="+mj-ea"/>
-                <a:ea typeface="+mj-ea"/>
-                <a:sym typeface="+mn-ea"/>
-              </a:rPr>
-              <a:t> </a:t>
-            </a:r>
-            <a:r>
-              <a:rPr lang="zh-CN" altLang="en-US" sz="2000" b="1" dirty="0">
-                <a:solidFill>
-                  <a:schemeClr val="bg1"/>
-                </a:solidFill>
-                <a:latin typeface="+mj-ea"/>
-                <a:ea typeface="+mj-ea"/>
-                <a:sym typeface="+mn-ea"/>
-              </a:rPr>
-              <a:t>计算机与信息学院</a:t>
+              <a:t>南京师范大学</a:t>
             </a:r>
             <a:r>
               <a:rPr lang="en-US" altLang="zh-CN" sz="2000" b="1" dirty="0">
@@ -9782,9 +9759,8 @@
                 </a:solidFill>
                 <a:latin typeface="+mj-ea"/>
                 <a:ea typeface="+mj-ea"/>
-                <a:sym typeface="+mn-ea"/>
               </a:rPr>
-              <a:t>合肥工业大学</a:t>
+              <a:t>南京师范大学</a:t>
             </a:r>
             <a:r>
               <a:rPr lang="en-US" altLang="zh-CN" sz="2000" b="1" dirty="0">
@@ -9795,18 +9771,7 @@
                 <a:ea typeface="+mj-ea"/>
                 <a:sym typeface="+mn-ea"/>
               </a:rPr>
-              <a:t> </a:t>
-            </a:r>
-            <a:r>
-              <a:rPr lang="zh-CN" altLang="en-US" sz="2000" b="1" dirty="0">
-                <a:solidFill>
-                  <a:schemeClr val="bg1"/>
-                </a:solidFill>
-                <a:latin typeface="+mj-ea"/>
-                <a:ea typeface="+mj-ea"/>
-                <a:sym typeface="+mn-ea"/>
-              </a:rPr>
-              <a:t>计算机与信息学院</a:t>
+              <a:t>  </a:t>
             </a:r>
             <a:r>
               <a:rPr lang="en-US" altLang="zh-CN" sz="2000" b="1" i="0" dirty="0">
